--- a/assets/powerpoints/module-n1-inscription/A3-les-mots-de-la-fiche.pptx
+++ b/assets/powerpoints/module-n1-inscription/A3-les-mots-de-la-fiche.pptx
@@ -9165,7 +9165,25 @@
                 </a:solidFill>
                 <a:latin typeface="Verdana"/>
               </a:rPr>
-              <a:t>Le nom de famille dans la case du nom, le prénom dans la case du prénom. Quand une case ne vous concerne pas, on écrit un trait : &lt;b&gt;—&lt;/b&gt;. Une case laissée vide fait croire à un oubli, et on vous rappellera pour rien.</a:t>
+              <a:t>Le nom de famille dans la case du nom, le prénom dans la case du prénom. Quand une case ne vous concerne pas, on écrit un trait : </a:t>
+            </a:r>
+            <a:r>
+              <a:rPr sz="2000" b="1" i="0">
+                <a:solidFill>
+                  <a:srgbClr val="4B4F52"/>
+                </a:solidFill>
+                <a:latin typeface="Verdana"/>
+              </a:rPr>
+              <a:t>—</a:t>
+            </a:r>
+            <a:r>
+              <a:rPr sz="2000" b="0" i="0">
+                <a:solidFill>
+                  <a:srgbClr val="4B4F52"/>
+                </a:solidFill>
+                <a:latin typeface="Verdana"/>
+              </a:rPr>
+              <a:t>. Une case laissée vide fait croire à un oubli, et on vous rappellera pour rien.</a:t>
             </a:r>
           </a:p>
         </p:txBody>
